--- a/WEEK_1_Day_6_Data_Capture.pptx
+++ b/WEEK_1_Day_6_Data_Capture.pptx
@@ -10,6 +10,7 @@
     <p:sldId id="258" r:id="rId9"/>
     <p:sldId id="259" r:id="rId10"/>
     <p:sldId id="260" r:id="rId11"/>
+    <p:sldId id="261" r:id="rId12"/>
   </p:sldIdLst>
   <p:sldSz cx="9144000" cy="6858000" type="screen4x3"/>
   <p:notesSz cx="6858000" cy="9144000"/>
@@ -3130,30 +3131,7 @@
         <p:txBody>
           <a:bodyPr/>
           <a:lstStyle/>
-          <a:p>
-            <a:r>
-              <a:rPr sz="2400" b="0">
-                <a:latin typeface="Times New Roman"/>
-              </a:rPr>
-              <a:t>Name: K.Santhosh Reddy</a:t>
-            </a:r>
-          </a:p>
-          <a:p>
-            <a:r>
-              <a:rPr sz="2400" b="0">
-                <a:latin typeface="Times New Roman"/>
-              </a:rPr>
-              <a:t>Cohort: 4 Batch A2</a:t>
-            </a:r>
-          </a:p>
-          <a:p>
-            <a:r>
-              <a:rPr sz="2400" b="0">
-                <a:latin typeface="Times New Roman"/>
-              </a:rPr>
-              <a:t>Mentor: Mr. Vamshi</a:t>
-            </a:r>
-          </a:p>
+          <a:p/>
         </p:txBody>
       </p:sp>
     </p:spTree>
@@ -3635,6 +3613,104 @@
                 <a:latin typeface="Times New Roman"/>
               </a:rPr>
               <a:t>Status Check: Methodology V1 is finalized and the theoretical design phase is officially frozen.</a:t>
+            </a:r>
+          </a:p>
+        </p:txBody>
+      </p:sp>
+    </p:spTree>
+  </p:cSld>
+  <p:clrMapOvr>
+    <a:masterClrMapping/>
+  </p:clrMapOvr>
+</p:sld>
+</file>
+
+<file path=ppt/slides/slide6.xml><?xml version="1.0" encoding="utf-8"?>
+<p:sld xmlns:a="http://schemas.openxmlformats.org/drawingml/2006/main" xmlns:p="http://schemas.openxmlformats.org/presentationml/2006/main" xmlns:r="http://schemas.openxmlformats.org/officeDocument/2006/relationships">
+  <p:cSld>
+    <p:spTree>
+      <p:nvGrpSpPr>
+        <p:cNvPr id="1" name=""/>
+        <p:cNvGrpSpPr/>
+        <p:nvPr/>
+      </p:nvGrpSpPr>
+      <p:grpSpPr/>
+      <p:sp>
+        <p:nvSpPr>
+          <p:cNvPr id="2" name="Title 1"/>
+          <p:cNvSpPr>
+            <a:spLocks noGrp="1"/>
+          </p:cNvSpPr>
+          <p:nvPr>
+            <p:ph type="title"/>
+          </p:nvPr>
+        </p:nvSpPr>
+        <p:spPr/>
+        <p:txBody>
+          <a:bodyPr/>
+          <a:lstStyle/>
+          <a:p>
+            <a:r>
+              <a:rPr>
+                <a:latin typeface="Times New Roman"/>
+              </a:rPr>
+              <a:t>Project Details</a:t>
+            </a:r>
+          </a:p>
+        </p:txBody>
+      </p:sp>
+      <p:sp>
+        <p:nvSpPr>
+          <p:cNvPr id="3" name="Content Placeholder 2"/>
+          <p:cNvSpPr>
+            <a:spLocks noGrp="1"/>
+          </p:cNvSpPr>
+          <p:nvPr>
+            <p:ph idx="1"/>
+          </p:nvPr>
+        </p:nvSpPr>
+        <p:spPr/>
+        <p:txBody>
+          <a:bodyPr/>
+          <a:lstStyle/>
+          <a:p/>
+          <a:p>
+            <a:pPr>
+              <a:spcAft>
+                <a:spcPts val="1400"/>
+              </a:spcAft>
+            </a:pPr>
+            <a:r>
+              <a:rPr sz="2800">
+                <a:latin typeface="Times New Roman"/>
+              </a:rPr>
+              <a:t>Name: K.Santhosh Reddy</a:t>
+            </a:r>
+          </a:p>
+          <a:p>
+            <a:pPr>
+              <a:spcAft>
+                <a:spcPts val="1400"/>
+              </a:spcAft>
+            </a:pPr>
+            <a:r>
+              <a:rPr sz="2800">
+                <a:latin typeface="Times New Roman"/>
+              </a:rPr>
+              <a:t>Cohort: 4 Batch A2</a:t>
+            </a:r>
+          </a:p>
+          <a:p>
+            <a:pPr>
+              <a:spcAft>
+                <a:spcPts val="1400"/>
+              </a:spcAft>
+            </a:pPr>
+            <a:r>
+              <a:rPr sz="2800">
+                <a:latin typeface="Times New Roman"/>
+              </a:rPr>
+              <a:t>Mentor: Mr. Vamshi</a:t>
             </a:r>
           </a:p>
         </p:txBody>
